--- a/Multi_Lang-services.pptx
+++ b/Multi_Lang-services.pptx
@@ -5,7 +5,7 @@
     <p:sldMasterId id="2147483648" r:id="rId1"/>
   </p:sldMasterIdLst>
   <p:notesMasterIdLst>
-    <p:notesMasterId r:id="rId17"/>
+    <p:notesMasterId r:id="rId18"/>
   </p:notesMasterIdLst>
   <p:sldIdLst>
     <p:sldId id="256" r:id="rId2"/>
@@ -21,8 +21,9 @@
     <p:sldId id="266" r:id="rId12"/>
     <p:sldId id="267" r:id="rId13"/>
     <p:sldId id="268" r:id="rId14"/>
-    <p:sldId id="269" r:id="rId15"/>
-    <p:sldId id="270" r:id="rId16"/>
+    <p:sldId id="272" r:id="rId15"/>
+    <p:sldId id="269" r:id="rId16"/>
+    <p:sldId id="270" r:id="rId17"/>
   </p:sldIdLst>
   <p:sldSz cx="12192000" cy="6858000"/>
   <p:notesSz cx="6858000" cy="12192000"/>
@@ -821,6 +822,90 @@
             <a:fld id="{F7021451-1387-4CA6-816F-3879F97B5CBC}" type="slidenum">
               <a:rPr lang="en-US"/>
               <a:t>15</a:t>
+            </a:fld>
+            <a:endParaRPr lang="en-US"/>
+          </a:p>
+        </p:txBody>
+      </p:sp>
+    </p:spTree>
+    <p:extLst>
+      <p:ext uri="{BB962C8B-B14F-4D97-AF65-F5344CB8AC3E}">
+        <p14:creationId xmlns:p14="http://schemas.microsoft.com/office/powerpoint/2010/main" val="1024086991"/>
+      </p:ext>
+    </p:extLst>
+  </p:cSld>
+  <p:clrMapOvr>
+    <a:masterClrMapping/>
+  </p:clrMapOvr>
+</p:notes>
+</file>
+
+<file path=ppt/notesSlides/notesSlide16.xml><?xml version="1.0" encoding="utf-8"?>
+<p:notes xmlns:a="http://schemas.openxmlformats.org/drawingml/2006/main" xmlns:r="http://schemas.openxmlformats.org/officeDocument/2006/relationships" xmlns:p="http://schemas.openxmlformats.org/presentationml/2006/main">
+  <p:cSld>
+    <p:spTree>
+      <p:nvGrpSpPr>
+        <p:cNvPr id="1" name=""/>
+        <p:cNvGrpSpPr/>
+        <p:nvPr/>
+      </p:nvGrpSpPr>
+      <p:grpSpPr>
+        <a:xfrm>
+          <a:off x="0" y="0"/>
+          <a:ext cx="0" cy="0"/>
+          <a:chOff x="0" y="0"/>
+          <a:chExt cx="0" cy="0"/>
+        </a:xfrm>
+      </p:grpSpPr>
+      <p:sp>
+        <p:nvSpPr>
+          <p:cNvPr id="2" name="Slide Image Placeholder 1"/>
+          <p:cNvSpPr>
+            <a:spLocks noGrp="1" noRot="1" noChangeAspect="1"/>
+          </p:cNvSpPr>
+          <p:nvPr>
+            <p:ph type="sldImg"/>
+          </p:nvPr>
+        </p:nvSpPr>
+        <p:spPr/>
+      </p:sp>
+      <p:sp>
+        <p:nvSpPr>
+          <p:cNvPr id="3" name="Notes Placeholder 2"/>
+          <p:cNvSpPr>
+            <a:spLocks noGrp="1"/>
+          </p:cNvSpPr>
+          <p:nvPr>
+            <p:ph type="body" idx="1"/>
+          </p:nvPr>
+        </p:nvSpPr>
+        <p:spPr/>
+        <p:txBody>
+          <a:bodyPr/>
+          <a:lstStyle/>
+          <a:p>
+            <a:endParaRPr lang="en-US" dirty="0"/>
+          </a:p>
+        </p:txBody>
+      </p:sp>
+      <p:sp>
+        <p:nvSpPr>
+          <p:cNvPr id="4" name="Slide Number Placeholder 3"/>
+          <p:cNvSpPr>
+            <a:spLocks noGrp="1"/>
+          </p:cNvSpPr>
+          <p:nvPr>
+            <p:ph type="sldNum" sz="quarter" idx="10"/>
+          </p:nvPr>
+        </p:nvSpPr>
+        <p:spPr/>
+        <p:txBody>
+          <a:bodyPr/>
+          <a:lstStyle/>
+          <a:p>
+            <a:fld id="{F7021451-1387-4CA6-816F-3879F97B5CBC}" type="slidenum">
+              <a:rPr lang="en-US"/>
+              <a:t>16</a:t>
             </a:fld>
             <a:endParaRPr lang="en-US"/>
           </a:p>
@@ -5538,6 +5623,2472 @@
 
 <file path=ppt/slides/slide14.xml><?xml version="1.0" encoding="utf-8"?>
 <p:sld xmlns:a="http://schemas.openxmlformats.org/drawingml/2006/main" xmlns:r="http://schemas.openxmlformats.org/officeDocument/2006/relationships" xmlns:p="http://schemas.openxmlformats.org/presentationml/2006/main">
+  <p:cSld>
+    <p:spTree>
+      <p:nvGrpSpPr>
+        <p:cNvPr id="1" name=""/>
+        <p:cNvGrpSpPr/>
+        <p:nvPr/>
+      </p:nvGrpSpPr>
+      <p:grpSpPr>
+        <a:xfrm>
+          <a:off x="0" y="0"/>
+          <a:ext cx="0" cy="0"/>
+          <a:chOff x="0" y="0"/>
+          <a:chExt cx="0" cy="0"/>
+        </a:xfrm>
+      </p:grpSpPr>
+      <p:sp>
+        <p:nvSpPr>
+          <p:cNvPr id="2" name="Text 0"/>
+          <p:cNvSpPr/>
+          <p:nvPr/>
+        </p:nvSpPr>
+        <p:spPr>
+          <a:xfrm>
+            <a:off x="548640" y="411480"/>
+            <a:ext cx="11064240" cy="640080"/>
+          </a:xfrm>
+          <a:prstGeom prst="rect">
+            <a:avLst/>
+          </a:prstGeom>
+          <a:noFill/>
+          <a:ln/>
+        </p:spPr>
+        <p:txBody>
+          <a:bodyPr wrap="square" lIns="0" tIns="0" rIns="0" bIns="0" rtlCol="0" anchor="ctr"/>
+          <a:lstStyle/>
+          <a:p>
+            <a:pPr marL="0" indent="0" algn="l">
+              <a:buNone/>
+            </a:pPr>
+            <a:r>
+              <a:rPr lang="en-US" sz="3000" b="1" dirty="0">
+                <a:solidFill>
+                  <a:srgbClr val="12293A"/>
+                </a:solidFill>
+                <a:latin typeface="Cambria" pitchFamily="34" charset="0"/>
+                <a:ea typeface="Cambria" pitchFamily="34" charset="-122"/>
+                <a:cs typeface="Cambria" pitchFamily="34" charset="-120"/>
+              </a:rPr>
+              <a:t>Reference Architecture — Input Translation &amp; Response Flow</a:t>
+            </a:r>
+            <a:endParaRPr lang="en-US" sz="3000" dirty="0"/>
+          </a:p>
+        </p:txBody>
+      </p:sp>
+      <p:sp>
+        <p:nvSpPr>
+          <p:cNvPr id="3" name="Text 1"/>
+          <p:cNvSpPr/>
+          <p:nvPr/>
+        </p:nvSpPr>
+        <p:spPr>
+          <a:xfrm>
+            <a:off x="548640" y="960120"/>
+            <a:ext cx="11064240" cy="365760"/>
+          </a:xfrm>
+          <a:prstGeom prst="rect">
+            <a:avLst/>
+          </a:prstGeom>
+          <a:noFill/>
+          <a:ln/>
+        </p:spPr>
+        <p:txBody>
+          <a:bodyPr wrap="square" lIns="0" tIns="0" rIns="0" bIns="0" rtlCol="0" anchor="ctr"/>
+          <a:lstStyle/>
+          <a:p>
+            <a:pPr marL="0" indent="0" algn="l">
+              <a:buNone/>
+            </a:pPr>
+            <a:r>
+              <a:rPr lang="en-US" sz="1350" i="1" dirty="0">
+                <a:solidFill>
+                  <a:srgbClr val="5C7A8A"/>
+                </a:solidFill>
+                <a:latin typeface="Calibri" pitchFamily="34" charset="0"/>
+                <a:ea typeface="Calibri" pitchFamily="34" charset="-122"/>
+                <a:cs typeface="Calibri" pitchFamily="34" charset="-120"/>
+              </a:rPr>
+              <a:t>Grouped by architectural layer — client, orchestration, translation, and agent/LLM — as implemented today</a:t>
+            </a:r>
+            <a:endParaRPr lang="en-US" sz="1350" dirty="0"/>
+          </a:p>
+        </p:txBody>
+      </p:sp>
+      <p:sp>
+        <p:nvSpPr>
+          <p:cNvPr id="4" name="Shape 2"/>
+          <p:cNvSpPr/>
+          <p:nvPr/>
+        </p:nvSpPr>
+        <p:spPr>
+          <a:xfrm>
+            <a:off x="320040" y="2834640"/>
+            <a:ext cx="1691640" cy="1051560"/>
+          </a:xfrm>
+          <a:prstGeom prst="roundRect">
+            <a:avLst>
+              <a:gd name="adj" fmla="val 10435"/>
+            </a:avLst>
+          </a:prstGeom>
+          <a:solidFill>
+            <a:srgbClr val="F6F7FA"/>
+          </a:solidFill>
+          <a:ln w="15875">
+            <a:solidFill>
+              <a:srgbClr val="9C6B57"/>
+            </a:solidFill>
+            <a:prstDash val="dash"/>
+          </a:ln>
+        </p:spPr>
+        <p:txBody>
+          <a:bodyPr/>
+          <a:lstStyle/>
+          <a:p>
+            <a:endParaRPr lang="en-US"/>
+          </a:p>
+        </p:txBody>
+      </p:sp>
+      <p:sp>
+        <p:nvSpPr>
+          <p:cNvPr id="5" name="Text 3"/>
+          <p:cNvSpPr/>
+          <p:nvPr/>
+        </p:nvSpPr>
+        <p:spPr>
+          <a:xfrm>
+            <a:off x="457200" y="2898648"/>
+            <a:ext cx="1417320" cy="201168"/>
+          </a:xfrm>
+          <a:prstGeom prst="rect">
+            <a:avLst/>
+          </a:prstGeom>
+          <a:noFill/>
+          <a:ln/>
+        </p:spPr>
+        <p:txBody>
+          <a:bodyPr wrap="square" lIns="0" tIns="0" rIns="0" bIns="0" rtlCol="0" anchor="ctr"/>
+          <a:lstStyle/>
+          <a:p>
+            <a:pPr marL="0" indent="0">
+              <a:buNone/>
+            </a:pPr>
+            <a:r>
+              <a:rPr lang="en-US" sz="900" b="1" kern="0" spc="120" dirty="0">
+                <a:solidFill>
+                  <a:srgbClr val="9C6B57"/>
+                </a:solidFill>
+                <a:latin typeface="Calibri" pitchFamily="34" charset="0"/>
+                <a:ea typeface="Calibri" pitchFamily="34" charset="-122"/>
+                <a:cs typeface="Calibri" pitchFamily="34" charset="-120"/>
+              </a:rPr>
+              <a:t>CLIENT</a:t>
+            </a:r>
+            <a:endParaRPr lang="en-US" sz="900" dirty="0"/>
+          </a:p>
+        </p:txBody>
+      </p:sp>
+      <p:sp>
+        <p:nvSpPr>
+          <p:cNvPr id="6" name="Shape 4"/>
+          <p:cNvSpPr/>
+          <p:nvPr/>
+        </p:nvSpPr>
+        <p:spPr>
+          <a:xfrm>
+            <a:off x="2103120" y="1353312"/>
+            <a:ext cx="4251960" cy="2487168"/>
+          </a:xfrm>
+          <a:prstGeom prst="roundRect">
+            <a:avLst>
+              <a:gd name="adj" fmla="val 4412"/>
+            </a:avLst>
+          </a:prstGeom>
+          <a:solidFill>
+            <a:srgbClr val="F6F7FA"/>
+          </a:solidFill>
+          <a:ln w="15875">
+            <a:solidFill>
+              <a:srgbClr val="6B4E85"/>
+            </a:solidFill>
+            <a:prstDash val="dash"/>
+          </a:ln>
+        </p:spPr>
+        <p:txBody>
+          <a:bodyPr/>
+          <a:lstStyle/>
+          <a:p>
+            <a:endParaRPr lang="en-US"/>
+          </a:p>
+        </p:txBody>
+      </p:sp>
+      <p:sp>
+        <p:nvSpPr>
+          <p:cNvPr id="7" name="Text 5"/>
+          <p:cNvSpPr/>
+          <p:nvPr/>
+        </p:nvSpPr>
+        <p:spPr>
+          <a:xfrm>
+            <a:off x="2240280" y="1417320"/>
+            <a:ext cx="3977640" cy="201168"/>
+          </a:xfrm>
+          <a:prstGeom prst="rect">
+            <a:avLst/>
+          </a:prstGeom>
+          <a:noFill/>
+          <a:ln/>
+        </p:spPr>
+        <p:txBody>
+          <a:bodyPr wrap="square" lIns="0" tIns="0" rIns="0" bIns="0" rtlCol="0" anchor="ctr"/>
+          <a:lstStyle/>
+          <a:p>
+            <a:pPr marL="0" indent="0">
+              <a:buNone/>
+            </a:pPr>
+            <a:r>
+              <a:rPr lang="en-US" sz="900" b="1" kern="0" spc="120" dirty="0">
+                <a:solidFill>
+                  <a:srgbClr val="6B4E85"/>
+                </a:solidFill>
+                <a:latin typeface="Calibri" pitchFamily="34" charset="0"/>
+                <a:ea typeface="Calibri" pitchFamily="34" charset="-122"/>
+                <a:cs typeface="Calibri" pitchFamily="34" charset="-120"/>
+              </a:rPr>
+              <a:t>ORCHESTRATION LAYER</a:t>
+            </a:r>
+            <a:endParaRPr lang="en-US" sz="900" dirty="0"/>
+          </a:p>
+        </p:txBody>
+      </p:sp>
+      <p:sp>
+        <p:nvSpPr>
+          <p:cNvPr id="8" name="Shape 6"/>
+          <p:cNvSpPr/>
+          <p:nvPr/>
+        </p:nvSpPr>
+        <p:spPr>
+          <a:xfrm>
+            <a:off x="3977640" y="4480560"/>
+            <a:ext cx="2514600" cy="2240280"/>
+          </a:xfrm>
+          <a:prstGeom prst="roundRect">
+            <a:avLst>
+              <a:gd name="adj" fmla="val 4898"/>
+            </a:avLst>
+          </a:prstGeom>
+          <a:solidFill>
+            <a:srgbClr val="F6F7FA"/>
+          </a:solidFill>
+          <a:ln w="15875">
+            <a:solidFill>
+              <a:srgbClr val="5C8142"/>
+            </a:solidFill>
+            <a:prstDash val="dash"/>
+          </a:ln>
+        </p:spPr>
+        <p:txBody>
+          <a:bodyPr/>
+          <a:lstStyle/>
+          <a:p>
+            <a:endParaRPr lang="en-US"/>
+          </a:p>
+        </p:txBody>
+      </p:sp>
+      <p:sp>
+        <p:nvSpPr>
+          <p:cNvPr id="9" name="Text 7"/>
+          <p:cNvSpPr/>
+          <p:nvPr/>
+        </p:nvSpPr>
+        <p:spPr>
+          <a:xfrm>
+            <a:off x="4114800" y="4544568"/>
+            <a:ext cx="2240280" cy="201168"/>
+          </a:xfrm>
+          <a:prstGeom prst="rect">
+            <a:avLst/>
+          </a:prstGeom>
+          <a:noFill/>
+          <a:ln/>
+        </p:spPr>
+        <p:txBody>
+          <a:bodyPr wrap="square" lIns="0" tIns="0" rIns="0" bIns="0" rtlCol="0" anchor="ctr"/>
+          <a:lstStyle/>
+          <a:p>
+            <a:pPr marL="0" indent="0">
+              <a:buNone/>
+            </a:pPr>
+            <a:r>
+              <a:rPr lang="en-US" sz="900" b="1" kern="0" spc="120" dirty="0">
+                <a:solidFill>
+                  <a:srgbClr val="5C8142"/>
+                </a:solidFill>
+                <a:latin typeface="Calibri" pitchFamily="34" charset="0"/>
+                <a:ea typeface="Calibri" pitchFamily="34" charset="-122"/>
+                <a:cs typeface="Calibri" pitchFamily="34" charset="-120"/>
+              </a:rPr>
+              <a:t>TRANSLATION LAYER</a:t>
+            </a:r>
+            <a:endParaRPr lang="en-US" sz="900" dirty="0"/>
+          </a:p>
+        </p:txBody>
+      </p:sp>
+      <p:sp>
+        <p:nvSpPr>
+          <p:cNvPr id="10" name="Shape 8"/>
+          <p:cNvSpPr/>
+          <p:nvPr/>
+        </p:nvSpPr>
+        <p:spPr>
+          <a:xfrm>
+            <a:off x="6537960" y="2011680"/>
+            <a:ext cx="4892040" cy="3703320"/>
+          </a:xfrm>
+          <a:prstGeom prst="roundRect">
+            <a:avLst>
+              <a:gd name="adj" fmla="val 2963"/>
+            </a:avLst>
+          </a:prstGeom>
+          <a:solidFill>
+            <a:srgbClr val="F6F7FA"/>
+          </a:solidFill>
+          <a:ln w="15875">
+            <a:solidFill>
+              <a:srgbClr val="2F5F7A"/>
+            </a:solidFill>
+            <a:prstDash val="dash"/>
+          </a:ln>
+        </p:spPr>
+        <p:txBody>
+          <a:bodyPr/>
+          <a:lstStyle/>
+          <a:p>
+            <a:endParaRPr lang="en-US"/>
+          </a:p>
+        </p:txBody>
+      </p:sp>
+      <p:sp>
+        <p:nvSpPr>
+          <p:cNvPr id="11" name="Text 9"/>
+          <p:cNvSpPr/>
+          <p:nvPr/>
+        </p:nvSpPr>
+        <p:spPr>
+          <a:xfrm>
+            <a:off x="6675120" y="2075688"/>
+            <a:ext cx="4617720" cy="201168"/>
+          </a:xfrm>
+          <a:prstGeom prst="rect">
+            <a:avLst/>
+          </a:prstGeom>
+          <a:noFill/>
+          <a:ln/>
+        </p:spPr>
+        <p:txBody>
+          <a:bodyPr wrap="square" lIns="0" tIns="0" rIns="0" bIns="0" rtlCol="0" anchor="ctr"/>
+          <a:lstStyle/>
+          <a:p>
+            <a:pPr marL="0" indent="0">
+              <a:buNone/>
+            </a:pPr>
+            <a:r>
+              <a:rPr lang="en-US" sz="900" b="1" kern="0" spc="120" dirty="0">
+                <a:solidFill>
+                  <a:srgbClr val="2F5F7A"/>
+                </a:solidFill>
+                <a:latin typeface="Calibri" pitchFamily="34" charset="0"/>
+                <a:ea typeface="Calibri" pitchFamily="34" charset="-122"/>
+                <a:cs typeface="Calibri" pitchFamily="34" charset="-120"/>
+              </a:rPr>
+              <a:t>AGENT / LLM LAYER</a:t>
+            </a:r>
+            <a:endParaRPr lang="en-US" sz="900" dirty="0"/>
+          </a:p>
+        </p:txBody>
+      </p:sp>
+      <p:sp>
+        <p:nvSpPr>
+          <p:cNvPr id="12" name="Shape 10"/>
+          <p:cNvSpPr/>
+          <p:nvPr/>
+        </p:nvSpPr>
+        <p:spPr>
+          <a:xfrm>
+            <a:off x="1920240" y="3360420"/>
+            <a:ext cx="365760" cy="0"/>
+          </a:xfrm>
+          <a:prstGeom prst="line">
+            <a:avLst/>
+          </a:prstGeom>
+          <a:noFill/>
+          <a:ln w="22225">
+            <a:solidFill>
+              <a:srgbClr val="12293A"/>
+            </a:solidFill>
+            <a:prstDash val="solid"/>
+            <a:tailEnd type="triangle"/>
+          </a:ln>
+        </p:spPr>
+        <p:txBody>
+          <a:bodyPr/>
+          <a:lstStyle/>
+          <a:p>
+            <a:endParaRPr lang="en-US"/>
+          </a:p>
+        </p:txBody>
+      </p:sp>
+      <p:sp>
+        <p:nvSpPr>
+          <p:cNvPr id="13" name="Shape 11"/>
+          <p:cNvSpPr/>
+          <p:nvPr/>
+        </p:nvSpPr>
+        <p:spPr>
+          <a:xfrm>
+            <a:off x="3977640" y="3360420"/>
+            <a:ext cx="365760" cy="0"/>
+          </a:xfrm>
+          <a:prstGeom prst="line">
+            <a:avLst/>
+          </a:prstGeom>
+          <a:noFill/>
+          <a:ln w="22225">
+            <a:solidFill>
+              <a:srgbClr val="12293A"/>
+            </a:solidFill>
+            <a:prstDash val="solid"/>
+            <a:tailEnd type="triangle"/>
+          </a:ln>
+        </p:spPr>
+        <p:txBody>
+          <a:bodyPr/>
+          <a:lstStyle/>
+          <a:p>
+            <a:endParaRPr lang="en-US"/>
+          </a:p>
+        </p:txBody>
+      </p:sp>
+      <p:sp>
+        <p:nvSpPr>
+          <p:cNvPr id="14" name="Shape 12"/>
+          <p:cNvSpPr/>
+          <p:nvPr/>
+        </p:nvSpPr>
+        <p:spPr>
+          <a:xfrm>
+            <a:off x="2651760" y="3657600"/>
+            <a:ext cx="0" cy="1325880"/>
+          </a:xfrm>
+          <a:prstGeom prst="line">
+            <a:avLst/>
+          </a:prstGeom>
+          <a:noFill/>
+          <a:ln w="19050">
+            <a:solidFill>
+              <a:srgbClr val="12293A"/>
+            </a:solidFill>
+            <a:prstDash val="solid"/>
+          </a:ln>
+        </p:spPr>
+        <p:txBody>
+          <a:bodyPr/>
+          <a:lstStyle/>
+          <a:p>
+            <a:endParaRPr lang="en-US"/>
+          </a:p>
+        </p:txBody>
+      </p:sp>
+      <p:sp>
+        <p:nvSpPr>
+          <p:cNvPr id="15" name="Shape 13"/>
+          <p:cNvSpPr/>
+          <p:nvPr/>
+        </p:nvSpPr>
+        <p:spPr>
+          <a:xfrm>
+            <a:off x="2651760" y="4983480"/>
+            <a:ext cx="1691640" cy="0"/>
+          </a:xfrm>
+          <a:prstGeom prst="line">
+            <a:avLst/>
+          </a:prstGeom>
+          <a:noFill/>
+          <a:ln w="22225">
+            <a:solidFill>
+              <a:srgbClr val="12293A"/>
+            </a:solidFill>
+            <a:prstDash val="solid"/>
+            <a:tailEnd type="triangle"/>
+          </a:ln>
+        </p:spPr>
+        <p:txBody>
+          <a:bodyPr/>
+          <a:lstStyle/>
+          <a:p>
+            <a:endParaRPr lang="en-US"/>
+          </a:p>
+        </p:txBody>
+      </p:sp>
+      <p:sp>
+        <p:nvSpPr>
+          <p:cNvPr id="16" name="Text 14"/>
+          <p:cNvSpPr/>
+          <p:nvPr/>
+        </p:nvSpPr>
+        <p:spPr>
+          <a:xfrm>
+            <a:off x="2697480" y="4690872"/>
+            <a:ext cx="1600200" cy="182880"/>
+          </a:xfrm>
+          <a:prstGeom prst="rect">
+            <a:avLst/>
+          </a:prstGeom>
+          <a:noFill/>
+          <a:ln/>
+        </p:spPr>
+        <p:txBody>
+          <a:bodyPr wrap="square" lIns="0" tIns="0" rIns="0" bIns="0" rtlCol="0" anchor="ctr"/>
+          <a:lstStyle/>
+          <a:p>
+            <a:pPr marL="0" indent="0" algn="l">
+              <a:buNone/>
+            </a:pPr>
+            <a:r>
+              <a:rPr lang="en-US" sz="750" dirty="0">
+                <a:solidFill>
+                  <a:srgbClr val="5C7A8A"/>
+                </a:solidFill>
+                <a:latin typeface="Consolas" pitchFamily="34" charset="0"/>
+                <a:ea typeface="Consolas" pitchFamily="34" charset="-122"/>
+                <a:cs typeface="Consolas" pitchFamily="34" charset="-120"/>
+              </a:rPr>
+              <a:t>HTTPS · sync</a:t>
+            </a:r>
+            <a:endParaRPr lang="en-US" sz="750" dirty="0"/>
+          </a:p>
+        </p:txBody>
+      </p:sp>
+      <p:sp>
+        <p:nvSpPr>
+          <p:cNvPr id="17" name="Shape 15"/>
+          <p:cNvSpPr/>
+          <p:nvPr/>
+        </p:nvSpPr>
+        <p:spPr>
+          <a:xfrm flipV="1">
+            <a:off x="5234940" y="1920240"/>
+            <a:ext cx="0" cy="1143000"/>
+          </a:xfrm>
+          <a:prstGeom prst="line">
+            <a:avLst/>
+          </a:prstGeom>
+          <a:noFill/>
+          <a:ln w="22225">
+            <a:solidFill>
+              <a:srgbClr val="12293A"/>
+            </a:solidFill>
+            <a:prstDash val="solid"/>
+            <a:tailEnd type="triangle"/>
+          </a:ln>
+        </p:spPr>
+        <p:txBody>
+          <a:bodyPr/>
+          <a:lstStyle/>
+          <a:p>
+            <a:endParaRPr lang="en-US"/>
+          </a:p>
+        </p:txBody>
+      </p:sp>
+      <p:sp>
+        <p:nvSpPr>
+          <p:cNvPr id="18" name="Shape 16"/>
+          <p:cNvSpPr/>
+          <p:nvPr/>
+        </p:nvSpPr>
+        <p:spPr>
+          <a:xfrm flipV="1">
+            <a:off x="6126480" y="2491740"/>
+            <a:ext cx="640080" cy="868680"/>
+          </a:xfrm>
+          <a:prstGeom prst="line">
+            <a:avLst/>
+          </a:prstGeom>
+          <a:noFill/>
+          <a:ln w="22225">
+            <a:solidFill>
+              <a:srgbClr val="12293A"/>
+            </a:solidFill>
+            <a:prstDash val="solid"/>
+            <a:tailEnd type="triangle"/>
+          </a:ln>
+        </p:spPr>
+        <p:txBody>
+          <a:bodyPr/>
+          <a:lstStyle/>
+          <a:p>
+            <a:endParaRPr lang="en-US"/>
+          </a:p>
+        </p:txBody>
+      </p:sp>
+      <p:sp>
+        <p:nvSpPr>
+          <p:cNvPr id="19" name="Shape 17"/>
+          <p:cNvSpPr/>
+          <p:nvPr/>
+        </p:nvSpPr>
+        <p:spPr>
+          <a:xfrm>
+            <a:off x="6126480" y="3360420"/>
+            <a:ext cx="640080" cy="777240"/>
+          </a:xfrm>
+          <a:prstGeom prst="line">
+            <a:avLst/>
+          </a:prstGeom>
+          <a:noFill/>
+          <a:ln w="22225">
+            <a:solidFill>
+              <a:srgbClr val="12293A"/>
+            </a:solidFill>
+            <a:prstDash val="solid"/>
+            <a:tailEnd type="triangle"/>
+          </a:ln>
+        </p:spPr>
+        <p:txBody>
+          <a:bodyPr/>
+          <a:lstStyle/>
+          <a:p>
+            <a:endParaRPr lang="en-US"/>
+          </a:p>
+        </p:txBody>
+      </p:sp>
+      <p:sp>
+        <p:nvSpPr>
+          <p:cNvPr id="20" name="Shape 18"/>
+          <p:cNvSpPr/>
+          <p:nvPr/>
+        </p:nvSpPr>
+        <p:spPr>
+          <a:xfrm>
+            <a:off x="8961120" y="2491740"/>
+            <a:ext cx="685800" cy="0"/>
+          </a:xfrm>
+          <a:prstGeom prst="line">
+            <a:avLst/>
+          </a:prstGeom>
+          <a:noFill/>
+          <a:ln w="22225">
+            <a:solidFill>
+              <a:srgbClr val="12293A"/>
+            </a:solidFill>
+            <a:prstDash val="solid"/>
+            <a:tailEnd type="triangle"/>
+          </a:ln>
+        </p:spPr>
+        <p:txBody>
+          <a:bodyPr/>
+          <a:lstStyle/>
+          <a:p>
+            <a:endParaRPr lang="en-US"/>
+          </a:p>
+        </p:txBody>
+      </p:sp>
+      <p:sp>
+        <p:nvSpPr>
+          <p:cNvPr id="21" name="Shape 19"/>
+          <p:cNvSpPr/>
+          <p:nvPr/>
+        </p:nvSpPr>
+        <p:spPr>
+          <a:xfrm>
+            <a:off x="8961120" y="4137660"/>
+            <a:ext cx="685800" cy="0"/>
+          </a:xfrm>
+          <a:prstGeom prst="line">
+            <a:avLst/>
+          </a:prstGeom>
+          <a:noFill/>
+          <a:ln w="22225">
+            <a:solidFill>
+              <a:srgbClr val="12293A"/>
+            </a:solidFill>
+            <a:prstDash val="solid"/>
+            <a:tailEnd type="triangle"/>
+          </a:ln>
+        </p:spPr>
+        <p:txBody>
+          <a:bodyPr/>
+          <a:lstStyle/>
+          <a:p>
+            <a:endParaRPr lang="en-US"/>
+          </a:p>
+        </p:txBody>
+      </p:sp>
+      <p:sp>
+        <p:nvSpPr>
+          <p:cNvPr id="22" name="Text 20"/>
+          <p:cNvSpPr/>
+          <p:nvPr/>
+        </p:nvSpPr>
+        <p:spPr>
+          <a:xfrm>
+            <a:off x="9006840" y="2217420"/>
+            <a:ext cx="594360" cy="182880"/>
+          </a:xfrm>
+          <a:prstGeom prst="rect">
+            <a:avLst/>
+          </a:prstGeom>
+          <a:noFill/>
+          <a:ln/>
+        </p:spPr>
+        <p:txBody>
+          <a:bodyPr wrap="square" lIns="0" tIns="0" rIns="0" bIns="0" rtlCol="0" anchor="ctr"/>
+          <a:lstStyle/>
+          <a:p>
+            <a:pPr marL="0" indent="0" algn="ctr">
+              <a:buNone/>
+            </a:pPr>
+            <a:r>
+              <a:rPr lang="en-US" sz="750" dirty="0">
+                <a:solidFill>
+                  <a:srgbClr val="5C7A8A"/>
+                </a:solidFill>
+                <a:latin typeface="Consolas" pitchFamily="34" charset="0"/>
+                <a:ea typeface="Consolas" pitchFamily="34" charset="-122"/>
+                <a:cs typeface="Consolas" pitchFamily="34" charset="-120"/>
+              </a:rPr>
+              <a:t>internal</a:t>
+            </a:r>
+            <a:endParaRPr lang="en-US" sz="750" dirty="0"/>
+          </a:p>
+        </p:txBody>
+      </p:sp>
+      <p:sp>
+        <p:nvSpPr>
+          <p:cNvPr id="23" name="Text 21"/>
+          <p:cNvSpPr/>
+          <p:nvPr/>
+        </p:nvSpPr>
+        <p:spPr>
+          <a:xfrm>
+            <a:off x="9006840" y="3863340"/>
+            <a:ext cx="594360" cy="182880"/>
+          </a:xfrm>
+          <a:prstGeom prst="rect">
+            <a:avLst/>
+          </a:prstGeom>
+          <a:noFill/>
+          <a:ln/>
+        </p:spPr>
+        <p:txBody>
+          <a:bodyPr wrap="square" lIns="0" tIns="0" rIns="0" bIns="0" rtlCol="0" anchor="ctr"/>
+          <a:lstStyle/>
+          <a:p>
+            <a:pPr marL="0" indent="0" algn="ctr">
+              <a:buNone/>
+            </a:pPr>
+            <a:r>
+              <a:rPr lang="en-US" sz="750" dirty="0">
+                <a:solidFill>
+                  <a:srgbClr val="5C7A8A"/>
+                </a:solidFill>
+                <a:latin typeface="Consolas" pitchFamily="34" charset="0"/>
+                <a:ea typeface="Consolas" pitchFamily="34" charset="-122"/>
+                <a:cs typeface="Consolas" pitchFamily="34" charset="-120"/>
+              </a:rPr>
+              <a:t>internal</a:t>
+            </a:r>
+            <a:endParaRPr lang="en-US" sz="750" dirty="0"/>
+          </a:p>
+        </p:txBody>
+      </p:sp>
+      <p:sp>
+        <p:nvSpPr>
+          <p:cNvPr id="24" name="Shape 22"/>
+          <p:cNvSpPr/>
+          <p:nvPr/>
+        </p:nvSpPr>
+        <p:spPr>
+          <a:xfrm>
+            <a:off x="7863840" y="4389120"/>
+            <a:ext cx="0" cy="320040"/>
+          </a:xfrm>
+          <a:prstGeom prst="line">
+            <a:avLst/>
+          </a:prstGeom>
+          <a:noFill/>
+          <a:ln w="22225">
+            <a:solidFill>
+              <a:srgbClr val="12293A"/>
+            </a:solidFill>
+            <a:prstDash val="solid"/>
+            <a:tailEnd type="triangle"/>
+          </a:ln>
+        </p:spPr>
+        <p:txBody>
+          <a:bodyPr/>
+          <a:lstStyle/>
+          <a:p>
+            <a:endParaRPr lang="en-US"/>
+          </a:p>
+        </p:txBody>
+      </p:sp>
+      <p:sp>
+        <p:nvSpPr>
+          <p:cNvPr id="25" name="Text 23"/>
+          <p:cNvSpPr/>
+          <p:nvPr/>
+        </p:nvSpPr>
+        <p:spPr>
+          <a:xfrm>
+            <a:off x="7936992" y="4407408"/>
+            <a:ext cx="1463040" cy="182880"/>
+          </a:xfrm>
+          <a:prstGeom prst="rect">
+            <a:avLst/>
+          </a:prstGeom>
+          <a:noFill/>
+          <a:ln/>
+        </p:spPr>
+        <p:txBody>
+          <a:bodyPr wrap="square" lIns="0" tIns="0" rIns="0" bIns="0" rtlCol="0" anchor="ctr"/>
+          <a:lstStyle/>
+          <a:p>
+            <a:pPr marL="0" indent="0" algn="l">
+              <a:buNone/>
+            </a:pPr>
+            <a:r>
+              <a:rPr lang="en-US" sz="750" dirty="0">
+                <a:solidFill>
+                  <a:srgbClr val="5C7A8A"/>
+                </a:solidFill>
+                <a:latin typeface="Consolas" pitchFamily="34" charset="0"/>
+                <a:ea typeface="Consolas" pitchFamily="34" charset="-122"/>
+                <a:cs typeface="Consolas" pitchFamily="34" charset="-120"/>
+              </a:rPr>
+              <a:t>model invoke</a:t>
+            </a:r>
+            <a:endParaRPr lang="en-US" sz="750" dirty="0"/>
+          </a:p>
+        </p:txBody>
+      </p:sp>
+      <p:sp>
+        <p:nvSpPr>
+          <p:cNvPr id="26" name="Shape 24"/>
+          <p:cNvSpPr/>
+          <p:nvPr/>
+        </p:nvSpPr>
+        <p:spPr>
+          <a:xfrm>
+            <a:off x="5234940" y="5257800"/>
+            <a:ext cx="0" cy="274320"/>
+          </a:xfrm>
+          <a:prstGeom prst="line">
+            <a:avLst/>
+          </a:prstGeom>
+          <a:noFill/>
+          <a:ln w="22225">
+            <a:solidFill>
+              <a:srgbClr val="12293A"/>
+            </a:solidFill>
+            <a:prstDash val="solid"/>
+            <a:tailEnd type="triangle"/>
+          </a:ln>
+        </p:spPr>
+        <p:txBody>
+          <a:bodyPr/>
+          <a:lstStyle/>
+          <a:p>
+            <a:endParaRPr lang="en-US"/>
+          </a:p>
+        </p:txBody>
+      </p:sp>
+      <p:sp>
+        <p:nvSpPr>
+          <p:cNvPr id="27" name="Text 25"/>
+          <p:cNvSpPr/>
+          <p:nvPr/>
+        </p:nvSpPr>
+        <p:spPr>
+          <a:xfrm>
+            <a:off x="5308092" y="5276088"/>
+            <a:ext cx="914400" cy="182880"/>
+          </a:xfrm>
+          <a:prstGeom prst="rect">
+            <a:avLst/>
+          </a:prstGeom>
+          <a:noFill/>
+          <a:ln/>
+        </p:spPr>
+        <p:txBody>
+          <a:bodyPr wrap="square" lIns="0" tIns="0" rIns="0" bIns="0" rtlCol="0" anchor="ctr"/>
+          <a:lstStyle/>
+          <a:p>
+            <a:pPr marL="0" indent="0" algn="l">
+              <a:buNone/>
+            </a:pPr>
+            <a:r>
+              <a:rPr lang="en-US" sz="750" dirty="0">
+                <a:solidFill>
+                  <a:srgbClr val="5C7A8A"/>
+                </a:solidFill>
+                <a:latin typeface="Consolas" pitchFamily="34" charset="0"/>
+                <a:ea typeface="Consolas" pitchFamily="34" charset="-122"/>
+                <a:cs typeface="Consolas" pitchFamily="34" charset="-120"/>
+              </a:rPr>
+              <a:t>REST</a:t>
+            </a:r>
+            <a:endParaRPr lang="en-US" sz="750" dirty="0"/>
+          </a:p>
+        </p:txBody>
+      </p:sp>
+      <p:sp>
+        <p:nvSpPr>
+          <p:cNvPr id="28" name="Shape 26"/>
+          <p:cNvSpPr/>
+          <p:nvPr/>
+        </p:nvSpPr>
+        <p:spPr>
+          <a:xfrm>
+            <a:off x="5234940" y="5989320"/>
+            <a:ext cx="0" cy="137160"/>
+          </a:xfrm>
+          <a:prstGeom prst="line">
+            <a:avLst/>
+          </a:prstGeom>
+          <a:noFill/>
+          <a:ln w="22225">
+            <a:solidFill>
+              <a:srgbClr val="12293A"/>
+            </a:solidFill>
+            <a:prstDash val="solid"/>
+            <a:tailEnd type="triangle"/>
+          </a:ln>
+        </p:spPr>
+        <p:txBody>
+          <a:bodyPr/>
+          <a:lstStyle/>
+          <a:p>
+            <a:endParaRPr lang="en-US"/>
+          </a:p>
+        </p:txBody>
+      </p:sp>
+      <p:sp>
+        <p:nvSpPr>
+          <p:cNvPr id="29" name="Text 27"/>
+          <p:cNvSpPr/>
+          <p:nvPr/>
+        </p:nvSpPr>
+        <p:spPr>
+          <a:xfrm>
+            <a:off x="5308092" y="5989320"/>
+            <a:ext cx="1463040" cy="182880"/>
+          </a:xfrm>
+          <a:prstGeom prst="rect">
+            <a:avLst/>
+          </a:prstGeom>
+          <a:noFill/>
+          <a:ln/>
+        </p:spPr>
+        <p:txBody>
+          <a:bodyPr wrap="square" lIns="0" tIns="0" rIns="0" bIns="0" rtlCol="0" anchor="ctr"/>
+          <a:lstStyle/>
+          <a:p>
+            <a:pPr marL="0" indent="0" algn="l">
+              <a:buNone/>
+            </a:pPr>
+            <a:r>
+              <a:rPr lang="en-US" sz="750" dirty="0">
+                <a:solidFill>
+                  <a:srgbClr val="5C7A8A"/>
+                </a:solidFill>
+                <a:latin typeface="Consolas" pitchFamily="34" charset="0"/>
+                <a:ea typeface="Consolas" pitchFamily="34" charset="-122"/>
+                <a:cs typeface="Consolas" pitchFamily="34" charset="-120"/>
+              </a:rPr>
+              <a:t>model invoke</a:t>
+            </a:r>
+            <a:endParaRPr lang="en-US" sz="750" dirty="0"/>
+          </a:p>
+        </p:txBody>
+      </p:sp>
+      <p:sp>
+        <p:nvSpPr>
+          <p:cNvPr id="30" name="Text 28"/>
+          <p:cNvSpPr/>
+          <p:nvPr/>
+        </p:nvSpPr>
+        <p:spPr>
+          <a:xfrm>
+            <a:off x="1463040" y="2542032"/>
+            <a:ext cx="1280160" cy="228600"/>
+          </a:xfrm>
+          <a:prstGeom prst="rect">
+            <a:avLst/>
+          </a:prstGeom>
+          <a:noFill/>
+          <a:ln/>
+        </p:spPr>
+        <p:txBody>
+          <a:bodyPr wrap="square" lIns="0" tIns="0" rIns="0" bIns="0" rtlCol="0" anchor="ctr"/>
+          <a:lstStyle/>
+          <a:p>
+            <a:pPr marL="0" indent="0" algn="ctr">
+              <a:buNone/>
+            </a:pPr>
+            <a:r>
+              <a:rPr lang="en-US" sz="900" b="1" i="1" dirty="0">
+                <a:solidFill>
+                  <a:srgbClr val="12293A"/>
+                </a:solidFill>
+                <a:latin typeface="Calibri" pitchFamily="34" charset="0"/>
+                <a:ea typeface="Calibri" pitchFamily="34" charset="-122"/>
+                <a:cs typeface="Calibri" pitchFamily="34" charset="-120"/>
+              </a:rPr>
+              <a:t>“Lang Code”:“fr-Fr”</a:t>
+            </a:r>
+            <a:endParaRPr lang="en-US" sz="900" dirty="0"/>
+          </a:p>
+        </p:txBody>
+      </p:sp>
+      <p:sp>
+        <p:nvSpPr>
+          <p:cNvPr id="31" name="Text 29"/>
+          <p:cNvSpPr/>
+          <p:nvPr/>
+        </p:nvSpPr>
+        <p:spPr>
+          <a:xfrm>
+            <a:off x="3154680" y="2587752"/>
+            <a:ext cx="2011680" cy="438912"/>
+          </a:xfrm>
+          <a:prstGeom prst="rect">
+            <a:avLst/>
+          </a:prstGeom>
+          <a:noFill/>
+          <a:ln/>
+        </p:spPr>
+        <p:txBody>
+          <a:bodyPr wrap="square" lIns="0" tIns="0" rIns="0" bIns="0" rtlCol="0" anchor="ctr"/>
+          <a:lstStyle/>
+          <a:p>
+            <a:pPr marL="0" indent="0" algn="ctr">
+              <a:lnSpc>
+                <a:spcPct val="105000"/>
+              </a:lnSpc>
+              <a:buNone/>
+            </a:pPr>
+            <a:r>
+              <a:rPr lang="en-US" sz="900" b="1" i="1" dirty="0">
+                <a:solidFill>
+                  <a:srgbClr val="12293A"/>
+                </a:solidFill>
+                <a:latin typeface="Calibri" pitchFamily="34" charset="0"/>
+                <a:ea typeface="Calibri" pitchFamily="34" charset="-122"/>
+                <a:cs typeface="Calibri" pitchFamily="34" charset="-120"/>
+              </a:rPr>
+              <a:t>Translated Utterance: Recent Transactions</a:t>
+            </a:r>
+            <a:endParaRPr lang="en-US" sz="900" dirty="0"/>
+          </a:p>
+        </p:txBody>
+      </p:sp>
+      <p:sp>
+        <p:nvSpPr>
+          <p:cNvPr id="32" name="Text 30"/>
+          <p:cNvSpPr/>
+          <p:nvPr/>
+        </p:nvSpPr>
+        <p:spPr>
+          <a:xfrm>
+            <a:off x="457200" y="4023360"/>
+            <a:ext cx="1920240" cy="457200"/>
+          </a:xfrm>
+          <a:prstGeom prst="rect">
+            <a:avLst/>
+          </a:prstGeom>
+          <a:noFill/>
+          <a:ln/>
+        </p:spPr>
+        <p:txBody>
+          <a:bodyPr wrap="square" lIns="0" tIns="0" rIns="0" bIns="0" rtlCol="0" anchor="ctr"/>
+          <a:lstStyle/>
+          <a:p>
+            <a:pPr marL="0" indent="0" algn="l">
+              <a:lnSpc>
+                <a:spcPct val="105000"/>
+              </a:lnSpc>
+              <a:buNone/>
+            </a:pPr>
+            <a:r>
+              <a:rPr lang="en-US" sz="950" b="1" i="1" dirty="0">
+                <a:solidFill>
+                  <a:srgbClr val="12293A"/>
+                </a:solidFill>
+                <a:latin typeface="Calibri" pitchFamily="34" charset="0"/>
+                <a:ea typeface="Calibri" pitchFamily="34" charset="-122"/>
+                <a:cs typeface="Calibri" pitchFamily="34" charset="-120"/>
+              </a:rPr>
+              <a:t>Actual Utterance:</a:t>
+            </a:r>
+            <a:endParaRPr lang="en-US" sz="950" dirty="0"/>
+          </a:p>
+          <a:p>
+            <a:pPr marL="0" indent="0" algn="l">
+              <a:lnSpc>
+                <a:spcPct val="105000"/>
+              </a:lnSpc>
+              <a:buNone/>
+            </a:pPr>
+            <a:r>
+              <a:rPr lang="en-US" sz="950" b="1" i="1" dirty="0">
+                <a:solidFill>
+                  <a:srgbClr val="12293A"/>
+                </a:solidFill>
+                <a:latin typeface="Calibri" pitchFamily="34" charset="0"/>
+                <a:ea typeface="Calibri" pitchFamily="34" charset="-122"/>
+                <a:cs typeface="Calibri" pitchFamily="34" charset="-120"/>
+              </a:rPr>
+              <a:t>Transactions récentes vers</a:t>
+            </a:r>
+            <a:endParaRPr lang="en-US" sz="950" dirty="0"/>
+          </a:p>
+        </p:txBody>
+      </p:sp>
+      <p:sp>
+        <p:nvSpPr>
+          <p:cNvPr id="33" name="Shape 31"/>
+          <p:cNvSpPr/>
+          <p:nvPr/>
+        </p:nvSpPr>
+        <p:spPr>
+          <a:xfrm>
+            <a:off x="4343400" y="1417320"/>
+            <a:ext cx="1783080" cy="502920"/>
+          </a:xfrm>
+          <a:prstGeom prst="roundRect">
+            <a:avLst>
+              <a:gd name="adj" fmla="val 14545"/>
+            </a:avLst>
+          </a:prstGeom>
+          <a:solidFill>
+            <a:srgbClr val="B7A0CC"/>
+          </a:solidFill>
+          <a:ln w="12700">
+            <a:solidFill>
+              <a:srgbClr val="1B7A93"/>
+            </a:solidFill>
+            <a:prstDash val="solid"/>
+          </a:ln>
+          <a:effectLst>
+            <a:outerShdw blurRad="76200" dist="25400" dir="5400000" algn="bl" rotWithShape="0">
+              <a:srgbClr val="1B2733">
+                <a:alpha val="18000"/>
+              </a:srgbClr>
+            </a:outerShdw>
+          </a:effectLst>
+        </p:spPr>
+        <p:txBody>
+          <a:bodyPr/>
+          <a:lstStyle/>
+          <a:p>
+            <a:endParaRPr lang="en-US"/>
+          </a:p>
+        </p:txBody>
+      </p:sp>
+      <p:sp>
+        <p:nvSpPr>
+          <p:cNvPr id="34" name="Text 32"/>
+          <p:cNvSpPr/>
+          <p:nvPr/>
+        </p:nvSpPr>
+        <p:spPr>
+          <a:xfrm>
+            <a:off x="4416552" y="1417320"/>
+            <a:ext cx="1636776" cy="502920"/>
+          </a:xfrm>
+          <a:prstGeom prst="rect">
+            <a:avLst/>
+          </a:prstGeom>
+          <a:noFill/>
+          <a:ln/>
+        </p:spPr>
+        <p:txBody>
+          <a:bodyPr wrap="square" lIns="0" tIns="0" rIns="0" bIns="0" rtlCol="0" anchor="ctr"/>
+          <a:lstStyle/>
+          <a:p>
+            <a:pPr marL="0" indent="0" algn="ctr">
+              <a:buNone/>
+            </a:pPr>
+            <a:r>
+              <a:rPr lang="en-US" sz="1250" b="1" dirty="0">
+                <a:solidFill>
+                  <a:srgbClr val="12293A"/>
+                </a:solidFill>
+                <a:latin typeface="Calibri" pitchFamily="34" charset="0"/>
+                <a:ea typeface="Calibri" pitchFamily="34" charset="-122"/>
+                <a:cs typeface="Calibri" pitchFamily="34" charset="-120"/>
+              </a:rPr>
+              <a:t>PII Redaction</a:t>
+            </a:r>
+            <a:endParaRPr lang="en-US" sz="1250" dirty="0"/>
+          </a:p>
+        </p:txBody>
+      </p:sp>
+      <p:sp>
+        <p:nvSpPr>
+          <p:cNvPr id="35" name="Shape 33"/>
+          <p:cNvSpPr/>
+          <p:nvPr/>
+        </p:nvSpPr>
+        <p:spPr>
+          <a:xfrm>
+            <a:off x="6766560" y="2240280"/>
+            <a:ext cx="2194560" cy="502920"/>
+          </a:xfrm>
+          <a:prstGeom prst="roundRect">
+            <a:avLst>
+              <a:gd name="adj" fmla="val 14545"/>
+            </a:avLst>
+          </a:prstGeom>
+          <a:solidFill>
+            <a:srgbClr val="B7A0CC"/>
+          </a:solidFill>
+          <a:ln w="12700">
+            <a:solidFill>
+              <a:srgbClr val="1B7A93"/>
+            </a:solidFill>
+            <a:prstDash val="solid"/>
+          </a:ln>
+          <a:effectLst>
+            <a:outerShdw blurRad="76200" dist="25400" dir="5400000" algn="bl" rotWithShape="0">
+              <a:srgbClr val="1B2733">
+                <a:alpha val="18000"/>
+              </a:srgbClr>
+            </a:outerShdw>
+          </a:effectLst>
+        </p:spPr>
+        <p:txBody>
+          <a:bodyPr/>
+          <a:lstStyle/>
+          <a:p>
+            <a:endParaRPr lang="en-US"/>
+          </a:p>
+        </p:txBody>
+      </p:sp>
+      <p:sp>
+        <p:nvSpPr>
+          <p:cNvPr id="36" name="Text 34"/>
+          <p:cNvSpPr/>
+          <p:nvPr/>
+        </p:nvSpPr>
+        <p:spPr>
+          <a:xfrm>
+            <a:off x="6839712" y="2240280"/>
+            <a:ext cx="2048256" cy="502920"/>
+          </a:xfrm>
+          <a:prstGeom prst="rect">
+            <a:avLst/>
+          </a:prstGeom>
+          <a:noFill/>
+          <a:ln/>
+        </p:spPr>
+        <p:txBody>
+          <a:bodyPr wrap="square" lIns="0" tIns="0" rIns="0" bIns="0" rtlCol="0" anchor="ctr"/>
+          <a:lstStyle/>
+          <a:p>
+            <a:pPr marL="0" indent="0" algn="ctr">
+              <a:buNone/>
+            </a:pPr>
+            <a:r>
+              <a:rPr lang="en-US" sz="1250" b="1" dirty="0">
+                <a:solidFill>
+                  <a:srgbClr val="12293A"/>
+                </a:solidFill>
+                <a:latin typeface="Calibri" pitchFamily="34" charset="0"/>
+                <a:ea typeface="Calibri" pitchFamily="34" charset="-122"/>
+                <a:cs typeface="Calibri" pitchFamily="34" charset="-120"/>
+              </a:rPr>
+              <a:t>NLP Processor</a:t>
+            </a:r>
+            <a:endParaRPr lang="en-US" sz="1250" dirty="0"/>
+          </a:p>
+        </p:txBody>
+      </p:sp>
+      <p:sp>
+        <p:nvSpPr>
+          <p:cNvPr id="37" name="Shape 35"/>
+          <p:cNvSpPr/>
+          <p:nvPr/>
+        </p:nvSpPr>
+        <p:spPr>
+          <a:xfrm>
+            <a:off x="9646920" y="2240280"/>
+            <a:ext cx="1554480" cy="502920"/>
+          </a:xfrm>
+          <a:prstGeom prst="roundRect">
+            <a:avLst>
+              <a:gd name="adj" fmla="val 14545"/>
+            </a:avLst>
+          </a:prstGeom>
+          <a:solidFill>
+            <a:srgbClr val="B7A0CC"/>
+          </a:solidFill>
+          <a:ln w="12700">
+            <a:solidFill>
+              <a:srgbClr val="1B7A93"/>
+            </a:solidFill>
+            <a:prstDash val="solid"/>
+          </a:ln>
+          <a:effectLst>
+            <a:outerShdw blurRad="76200" dist="25400" dir="5400000" algn="bl" rotWithShape="0">
+              <a:srgbClr val="1B2733">
+                <a:alpha val="18000"/>
+              </a:srgbClr>
+            </a:outerShdw>
+          </a:effectLst>
+        </p:spPr>
+        <p:txBody>
+          <a:bodyPr/>
+          <a:lstStyle/>
+          <a:p>
+            <a:endParaRPr lang="en-US"/>
+          </a:p>
+        </p:txBody>
+      </p:sp>
+      <p:sp>
+        <p:nvSpPr>
+          <p:cNvPr id="38" name="Text 36"/>
+          <p:cNvSpPr/>
+          <p:nvPr/>
+        </p:nvSpPr>
+        <p:spPr>
+          <a:xfrm>
+            <a:off x="9720072" y="2240280"/>
+            <a:ext cx="1408176" cy="502920"/>
+          </a:xfrm>
+          <a:prstGeom prst="rect">
+            <a:avLst/>
+          </a:prstGeom>
+          <a:noFill/>
+          <a:ln/>
+        </p:spPr>
+        <p:txBody>
+          <a:bodyPr wrap="square" lIns="0" tIns="0" rIns="0" bIns="0" rtlCol="0" anchor="ctr"/>
+          <a:lstStyle/>
+          <a:p>
+            <a:pPr marL="0" indent="0" algn="ctr">
+              <a:buNone/>
+            </a:pPr>
+            <a:r>
+              <a:rPr lang="en-US" sz="1250" b="1" dirty="0">
+                <a:solidFill>
+                  <a:srgbClr val="12293A"/>
+                </a:solidFill>
+                <a:latin typeface="Calibri" pitchFamily="34" charset="0"/>
+                <a:ea typeface="Calibri" pitchFamily="34" charset="-122"/>
+                <a:cs typeface="Calibri" pitchFamily="34" charset="-120"/>
+              </a:rPr>
+              <a:t>Backend SOR</a:t>
+            </a:r>
+            <a:endParaRPr lang="en-US" sz="1250" dirty="0"/>
+          </a:p>
+        </p:txBody>
+      </p:sp>
+      <p:sp>
+        <p:nvSpPr>
+          <p:cNvPr id="39" name="Shape 37"/>
+          <p:cNvSpPr/>
+          <p:nvPr/>
+        </p:nvSpPr>
+        <p:spPr>
+          <a:xfrm>
+            <a:off x="548640" y="3063240"/>
+            <a:ext cx="1371600" cy="594360"/>
+          </a:xfrm>
+          <a:prstGeom prst="roundRect">
+            <a:avLst>
+              <a:gd name="adj" fmla="val 12308"/>
+            </a:avLst>
+          </a:prstGeom>
+          <a:solidFill>
+            <a:srgbClr val="CC9C8A"/>
+          </a:solidFill>
+          <a:ln w="12700">
+            <a:solidFill>
+              <a:srgbClr val="1B7A93"/>
+            </a:solidFill>
+            <a:prstDash val="solid"/>
+          </a:ln>
+          <a:effectLst>
+            <a:outerShdw blurRad="76200" dist="25400" dir="5400000" algn="bl" rotWithShape="0">
+              <a:srgbClr val="1B2733">
+                <a:alpha val="18000"/>
+              </a:srgbClr>
+            </a:outerShdw>
+          </a:effectLst>
+        </p:spPr>
+        <p:txBody>
+          <a:bodyPr/>
+          <a:lstStyle/>
+          <a:p>
+            <a:endParaRPr lang="en-US"/>
+          </a:p>
+        </p:txBody>
+      </p:sp>
+      <p:sp>
+        <p:nvSpPr>
+          <p:cNvPr id="40" name="Text 38"/>
+          <p:cNvSpPr/>
+          <p:nvPr/>
+        </p:nvSpPr>
+        <p:spPr>
+          <a:xfrm>
+            <a:off x="621792" y="3063240"/>
+            <a:ext cx="1225296" cy="594360"/>
+          </a:xfrm>
+          <a:prstGeom prst="rect">
+            <a:avLst/>
+          </a:prstGeom>
+          <a:noFill/>
+          <a:ln/>
+        </p:spPr>
+        <p:txBody>
+          <a:bodyPr wrap="square" lIns="0" tIns="0" rIns="0" bIns="0" rtlCol="0" anchor="ctr"/>
+          <a:lstStyle/>
+          <a:p>
+            <a:pPr marL="0" indent="0" algn="ctr">
+              <a:buNone/>
+            </a:pPr>
+            <a:r>
+              <a:rPr lang="en-US" sz="1300" b="1" dirty="0">
+                <a:solidFill>
+                  <a:srgbClr val="12293A"/>
+                </a:solidFill>
+                <a:latin typeface="Calibri" pitchFamily="34" charset="0"/>
+                <a:ea typeface="Calibri" pitchFamily="34" charset="-122"/>
+                <a:cs typeface="Calibri" pitchFamily="34" charset="-120"/>
+              </a:rPr>
+              <a:t>UI</a:t>
+            </a:r>
+            <a:endParaRPr lang="en-US" sz="1300" dirty="0"/>
+          </a:p>
+        </p:txBody>
+      </p:sp>
+      <p:sp>
+        <p:nvSpPr>
+          <p:cNvPr id="41" name="Shape 39"/>
+          <p:cNvSpPr/>
+          <p:nvPr/>
+        </p:nvSpPr>
+        <p:spPr>
+          <a:xfrm>
+            <a:off x="2286000" y="3063240"/>
+            <a:ext cx="1691640" cy="594360"/>
+          </a:xfrm>
+          <a:prstGeom prst="roundRect">
+            <a:avLst>
+              <a:gd name="adj" fmla="val 12308"/>
+            </a:avLst>
+          </a:prstGeom>
+          <a:solidFill>
+            <a:srgbClr val="B7A0CC"/>
+          </a:solidFill>
+          <a:ln w="12700">
+            <a:solidFill>
+              <a:srgbClr val="1B7A93"/>
+            </a:solidFill>
+            <a:prstDash val="solid"/>
+          </a:ln>
+          <a:effectLst>
+            <a:outerShdw blurRad="76200" dist="25400" dir="5400000" algn="bl" rotWithShape="0">
+              <a:srgbClr val="1B2733">
+                <a:alpha val="18000"/>
+              </a:srgbClr>
+            </a:outerShdw>
+          </a:effectLst>
+        </p:spPr>
+        <p:txBody>
+          <a:bodyPr/>
+          <a:lstStyle/>
+          <a:p>
+            <a:endParaRPr lang="en-US"/>
+          </a:p>
+        </p:txBody>
+      </p:sp>
+      <p:sp>
+        <p:nvSpPr>
+          <p:cNvPr id="42" name="Text 40"/>
+          <p:cNvSpPr/>
+          <p:nvPr/>
+        </p:nvSpPr>
+        <p:spPr>
+          <a:xfrm>
+            <a:off x="2359152" y="3063240"/>
+            <a:ext cx="1545336" cy="594360"/>
+          </a:xfrm>
+          <a:prstGeom prst="rect">
+            <a:avLst/>
+          </a:prstGeom>
+          <a:noFill/>
+          <a:ln/>
+        </p:spPr>
+        <p:txBody>
+          <a:bodyPr wrap="square" lIns="0" tIns="0" rIns="0" bIns="0" rtlCol="0" anchor="ctr"/>
+          <a:lstStyle/>
+          <a:p>
+            <a:pPr marL="0" indent="0" algn="ctr">
+              <a:buNone/>
+            </a:pPr>
+            <a:r>
+              <a:rPr lang="en-US" sz="1150" b="1" dirty="0">
+                <a:solidFill>
+                  <a:srgbClr val="12293A"/>
+                </a:solidFill>
+                <a:latin typeface="Calibri" pitchFamily="34" charset="0"/>
+                <a:ea typeface="Calibri" pitchFamily="34" charset="-122"/>
+                <a:cs typeface="Calibri" pitchFamily="34" charset="-120"/>
+              </a:rPr>
+              <a:t>Front Controller Service</a:t>
+            </a:r>
+            <a:endParaRPr lang="en-US" sz="1150" dirty="0"/>
+          </a:p>
+        </p:txBody>
+      </p:sp>
+      <p:sp>
+        <p:nvSpPr>
+          <p:cNvPr id="43" name="Shape 41"/>
+          <p:cNvSpPr/>
+          <p:nvPr/>
+        </p:nvSpPr>
+        <p:spPr>
+          <a:xfrm>
+            <a:off x="4343400" y="3063240"/>
+            <a:ext cx="1783080" cy="594360"/>
+          </a:xfrm>
+          <a:prstGeom prst="roundRect">
+            <a:avLst>
+              <a:gd name="adj" fmla="val 12308"/>
+            </a:avLst>
+          </a:prstGeom>
+          <a:solidFill>
+            <a:srgbClr val="B7A0CC"/>
+          </a:solidFill>
+          <a:ln w="12700">
+            <a:solidFill>
+              <a:srgbClr val="1B7A93"/>
+            </a:solidFill>
+            <a:prstDash val="solid"/>
+          </a:ln>
+          <a:effectLst>
+            <a:outerShdw blurRad="76200" dist="25400" dir="5400000" algn="bl" rotWithShape="0">
+              <a:srgbClr val="1B2733">
+                <a:alpha val="18000"/>
+              </a:srgbClr>
+            </a:outerShdw>
+          </a:effectLst>
+        </p:spPr>
+        <p:txBody>
+          <a:bodyPr/>
+          <a:lstStyle/>
+          <a:p>
+            <a:endParaRPr lang="en-US"/>
+          </a:p>
+        </p:txBody>
+      </p:sp>
+      <p:sp>
+        <p:nvSpPr>
+          <p:cNvPr id="44" name="Text 42"/>
+          <p:cNvSpPr/>
+          <p:nvPr/>
+        </p:nvSpPr>
+        <p:spPr>
+          <a:xfrm>
+            <a:off x="4416552" y="3063240"/>
+            <a:ext cx="1636776" cy="594360"/>
+          </a:xfrm>
+          <a:prstGeom prst="rect">
+            <a:avLst/>
+          </a:prstGeom>
+          <a:noFill/>
+          <a:ln/>
+        </p:spPr>
+        <p:txBody>
+          <a:bodyPr wrap="square" lIns="0" tIns="0" rIns="0" bIns="0" rtlCol="0" anchor="ctr"/>
+          <a:lstStyle/>
+          <a:p>
+            <a:pPr marL="0" indent="0" algn="ctr">
+              <a:buNone/>
+            </a:pPr>
+            <a:r>
+              <a:rPr lang="en-US" sz="1200" b="1" dirty="0">
+                <a:solidFill>
+                  <a:srgbClr val="12293A"/>
+                </a:solidFill>
+                <a:latin typeface="Calibri" pitchFamily="34" charset="0"/>
+                <a:ea typeface="Calibri" pitchFamily="34" charset="-122"/>
+                <a:cs typeface="Calibri" pitchFamily="34" charset="-120"/>
+              </a:rPr>
+              <a:t>Backend Processor</a:t>
+            </a:r>
+            <a:endParaRPr lang="en-US" sz="1200" dirty="0"/>
+          </a:p>
+        </p:txBody>
+      </p:sp>
+      <p:sp>
+        <p:nvSpPr>
+          <p:cNvPr id="45" name="Shape 43"/>
+          <p:cNvSpPr/>
+          <p:nvPr/>
+        </p:nvSpPr>
+        <p:spPr>
+          <a:xfrm>
+            <a:off x="6766560" y="3886200"/>
+            <a:ext cx="2194560" cy="502920"/>
+          </a:xfrm>
+          <a:prstGeom prst="roundRect">
+            <a:avLst>
+              <a:gd name="adj" fmla="val 14545"/>
+            </a:avLst>
+          </a:prstGeom>
+          <a:solidFill>
+            <a:srgbClr val="6F9FB8"/>
+          </a:solidFill>
+          <a:ln w="12700">
+            <a:solidFill>
+              <a:srgbClr val="1B7A93"/>
+            </a:solidFill>
+            <a:prstDash val="solid"/>
+          </a:ln>
+          <a:effectLst>
+            <a:outerShdw blurRad="76200" dist="25400" dir="5400000" algn="bl" rotWithShape="0">
+              <a:srgbClr val="1B2733">
+                <a:alpha val="18000"/>
+              </a:srgbClr>
+            </a:outerShdw>
+          </a:effectLst>
+        </p:spPr>
+        <p:txBody>
+          <a:bodyPr/>
+          <a:lstStyle/>
+          <a:p>
+            <a:endParaRPr lang="en-US"/>
+          </a:p>
+        </p:txBody>
+      </p:sp>
+      <p:sp>
+        <p:nvSpPr>
+          <p:cNvPr id="46" name="Text 44"/>
+          <p:cNvSpPr/>
+          <p:nvPr/>
+        </p:nvSpPr>
+        <p:spPr>
+          <a:xfrm>
+            <a:off x="6839712" y="3886200"/>
+            <a:ext cx="2048256" cy="502920"/>
+          </a:xfrm>
+          <a:prstGeom prst="rect">
+            <a:avLst/>
+          </a:prstGeom>
+          <a:noFill/>
+          <a:ln/>
+        </p:spPr>
+        <p:txBody>
+          <a:bodyPr wrap="square" lIns="0" tIns="0" rIns="0" bIns="0" rtlCol="0" anchor="ctr"/>
+          <a:lstStyle/>
+          <a:p>
+            <a:pPr marL="0" indent="0" algn="ctr">
+              <a:buNone/>
+            </a:pPr>
+            <a:r>
+              <a:rPr lang="en-US" sz="1250" b="1" dirty="0">
+                <a:solidFill>
+                  <a:srgbClr val="FFFFFF"/>
+                </a:solidFill>
+                <a:latin typeface="Calibri" pitchFamily="34" charset="0"/>
+                <a:ea typeface="Calibri" pitchFamily="34" charset="-122"/>
+                <a:cs typeface="Calibri" pitchFamily="34" charset="-120"/>
+              </a:rPr>
+              <a:t>Google ADK Agent</a:t>
+            </a:r>
+            <a:endParaRPr lang="en-US" sz="1250" dirty="0"/>
+          </a:p>
+        </p:txBody>
+      </p:sp>
+      <p:sp>
+        <p:nvSpPr>
+          <p:cNvPr id="47" name="Shape 45"/>
+          <p:cNvSpPr/>
+          <p:nvPr/>
+        </p:nvSpPr>
+        <p:spPr>
+          <a:xfrm>
+            <a:off x="9646920" y="3886200"/>
+            <a:ext cx="1554480" cy="502920"/>
+          </a:xfrm>
+          <a:prstGeom prst="roundRect">
+            <a:avLst>
+              <a:gd name="adj" fmla="val 14545"/>
+            </a:avLst>
+          </a:prstGeom>
+          <a:solidFill>
+            <a:srgbClr val="6F9FB8"/>
+          </a:solidFill>
+          <a:ln w="12700">
+            <a:solidFill>
+              <a:srgbClr val="1B7A93"/>
+            </a:solidFill>
+            <a:prstDash val="solid"/>
+          </a:ln>
+          <a:effectLst>
+            <a:outerShdw blurRad="76200" dist="25400" dir="5400000" algn="bl" rotWithShape="0">
+              <a:srgbClr val="1B2733">
+                <a:alpha val="18000"/>
+              </a:srgbClr>
+            </a:outerShdw>
+          </a:effectLst>
+        </p:spPr>
+        <p:txBody>
+          <a:bodyPr/>
+          <a:lstStyle/>
+          <a:p>
+            <a:endParaRPr lang="en-US"/>
+          </a:p>
+        </p:txBody>
+      </p:sp>
+      <p:sp>
+        <p:nvSpPr>
+          <p:cNvPr id="48" name="Text 46"/>
+          <p:cNvSpPr/>
+          <p:nvPr/>
+        </p:nvSpPr>
+        <p:spPr>
+          <a:xfrm>
+            <a:off x="9720072" y="3886200"/>
+            <a:ext cx="1408176" cy="502920"/>
+          </a:xfrm>
+          <a:prstGeom prst="rect">
+            <a:avLst/>
+          </a:prstGeom>
+          <a:noFill/>
+          <a:ln/>
+        </p:spPr>
+        <p:txBody>
+          <a:bodyPr wrap="square" lIns="0" tIns="0" rIns="0" bIns="0" rtlCol="0" anchor="ctr"/>
+          <a:lstStyle/>
+          <a:p>
+            <a:pPr marL="0" indent="0" algn="ctr">
+              <a:buNone/>
+            </a:pPr>
+            <a:r>
+              <a:rPr lang="en-US" sz="1250" b="1" dirty="0">
+                <a:solidFill>
+                  <a:srgbClr val="FFFFFF"/>
+                </a:solidFill>
+                <a:latin typeface="Calibri" pitchFamily="34" charset="0"/>
+                <a:ea typeface="Calibri" pitchFamily="34" charset="-122"/>
+                <a:cs typeface="Calibri" pitchFamily="34" charset="-120"/>
+              </a:rPr>
+              <a:t>MCP</a:t>
+            </a:r>
+            <a:endParaRPr lang="en-US" sz="1250" dirty="0"/>
+          </a:p>
+        </p:txBody>
+      </p:sp>
+      <p:sp>
+        <p:nvSpPr>
+          <p:cNvPr id="49" name="Shape 47"/>
+          <p:cNvSpPr/>
+          <p:nvPr/>
+        </p:nvSpPr>
+        <p:spPr>
+          <a:xfrm>
+            <a:off x="4343400" y="4709160"/>
+            <a:ext cx="1783080" cy="548640"/>
+          </a:xfrm>
+          <a:prstGeom prst="roundRect">
+            <a:avLst>
+              <a:gd name="adj" fmla="val 13333"/>
+            </a:avLst>
+          </a:prstGeom>
+          <a:solidFill>
+            <a:srgbClr val="A6CB8B"/>
+          </a:solidFill>
+          <a:ln w="12700">
+            <a:solidFill>
+              <a:srgbClr val="1B7A93"/>
+            </a:solidFill>
+            <a:prstDash val="solid"/>
+          </a:ln>
+          <a:effectLst>
+            <a:outerShdw blurRad="76200" dist="25400" dir="5400000" algn="bl" rotWithShape="0">
+              <a:srgbClr val="1B2733">
+                <a:alpha val="18000"/>
+              </a:srgbClr>
+            </a:outerShdw>
+          </a:effectLst>
+        </p:spPr>
+        <p:txBody>
+          <a:bodyPr/>
+          <a:lstStyle/>
+          <a:p>
+            <a:endParaRPr lang="en-US"/>
+          </a:p>
+        </p:txBody>
+      </p:sp>
+      <p:sp>
+        <p:nvSpPr>
+          <p:cNvPr id="50" name="Text 48"/>
+          <p:cNvSpPr/>
+          <p:nvPr/>
+        </p:nvSpPr>
+        <p:spPr>
+          <a:xfrm>
+            <a:off x="4416552" y="4709160"/>
+            <a:ext cx="1636776" cy="548640"/>
+          </a:xfrm>
+          <a:prstGeom prst="rect">
+            <a:avLst/>
+          </a:prstGeom>
+          <a:noFill/>
+          <a:ln/>
+        </p:spPr>
+        <p:txBody>
+          <a:bodyPr wrap="square" lIns="0" tIns="0" rIns="0" bIns="0" rtlCol="0" anchor="ctr"/>
+          <a:lstStyle/>
+          <a:p>
+            <a:pPr marL="0" indent="0" algn="ctr">
+              <a:buNone/>
+            </a:pPr>
+            <a:r>
+              <a:rPr lang="en-US" sz="1200" b="1" dirty="0">
+                <a:solidFill>
+                  <a:srgbClr val="12293A"/>
+                </a:solidFill>
+                <a:latin typeface="Calibri" pitchFamily="34" charset="0"/>
+                <a:ea typeface="Calibri" pitchFamily="34" charset="-122"/>
+                <a:cs typeface="Calibri" pitchFamily="34" charset="-120"/>
+              </a:rPr>
+              <a:t>Translation Service</a:t>
+            </a:r>
+            <a:endParaRPr lang="en-US" sz="1200" dirty="0"/>
+          </a:p>
+        </p:txBody>
+      </p:sp>
+      <p:sp>
+        <p:nvSpPr>
+          <p:cNvPr id="51" name="Shape 49"/>
+          <p:cNvSpPr/>
+          <p:nvPr/>
+        </p:nvSpPr>
+        <p:spPr>
+          <a:xfrm>
+            <a:off x="6858000" y="4709160"/>
+            <a:ext cx="2011680" cy="777240"/>
+          </a:xfrm>
+          <a:prstGeom prst="roundRect">
+            <a:avLst>
+              <a:gd name="adj" fmla="val 9412"/>
+            </a:avLst>
+          </a:prstGeom>
+          <a:solidFill>
+            <a:srgbClr val="6F9FB8"/>
+          </a:solidFill>
+          <a:ln w="12700">
+            <a:solidFill>
+              <a:srgbClr val="1B7A93"/>
+            </a:solidFill>
+            <a:prstDash val="solid"/>
+          </a:ln>
+          <a:effectLst>
+            <a:outerShdw blurRad="76200" dist="25400" dir="5400000" algn="bl" rotWithShape="0">
+              <a:srgbClr val="1B2733">
+                <a:alpha val="18000"/>
+              </a:srgbClr>
+            </a:outerShdw>
+          </a:effectLst>
+        </p:spPr>
+        <p:txBody>
+          <a:bodyPr/>
+          <a:lstStyle/>
+          <a:p>
+            <a:endParaRPr lang="en-US"/>
+          </a:p>
+        </p:txBody>
+      </p:sp>
+      <p:sp>
+        <p:nvSpPr>
+          <p:cNvPr id="52" name="Text 50"/>
+          <p:cNvSpPr/>
+          <p:nvPr/>
+        </p:nvSpPr>
+        <p:spPr>
+          <a:xfrm>
+            <a:off x="6931152" y="4709160"/>
+            <a:ext cx="1865376" cy="777240"/>
+          </a:xfrm>
+          <a:prstGeom prst="rect">
+            <a:avLst/>
+          </a:prstGeom>
+          <a:noFill/>
+          <a:ln/>
+        </p:spPr>
+        <p:txBody>
+          <a:bodyPr wrap="square" lIns="0" tIns="0" rIns="0" bIns="0" rtlCol="0" anchor="ctr"/>
+          <a:lstStyle/>
+          <a:p>
+            <a:pPr marL="0" indent="0" algn="ctr">
+              <a:buNone/>
+            </a:pPr>
+            <a:r>
+              <a:rPr lang="en-US" sz="1150" b="1" dirty="0">
+                <a:solidFill>
+                  <a:srgbClr val="FFFFFF"/>
+                </a:solidFill>
+                <a:latin typeface="Calibri" pitchFamily="34" charset="0"/>
+                <a:ea typeface="Calibri" pitchFamily="34" charset="-122"/>
+                <a:cs typeface="Calibri" pitchFamily="34" charset="-120"/>
+              </a:rPr>
+              <a:t>LLM Call –1</a:t>
+            </a:r>
+            <a:endParaRPr lang="en-US" sz="1150" dirty="0"/>
+          </a:p>
+          <a:p>
+            <a:pPr marL="0" indent="0" algn="ctr">
+              <a:buNone/>
+            </a:pPr>
+            <a:r>
+              <a:rPr lang="en-US" sz="1150" b="1" dirty="0">
+                <a:solidFill>
+                  <a:srgbClr val="FFFFFF"/>
+                </a:solidFill>
+                <a:latin typeface="Calibri" pitchFamily="34" charset="0"/>
+                <a:ea typeface="Calibri" pitchFamily="34" charset="-122"/>
+                <a:cs typeface="Calibri" pitchFamily="34" charset="-120"/>
+              </a:rPr>
+              <a:t>(for Response Generation)</a:t>
+            </a:r>
+            <a:endParaRPr lang="en-US" sz="1150" dirty="0"/>
+          </a:p>
+        </p:txBody>
+      </p:sp>
+      <p:sp>
+        <p:nvSpPr>
+          <p:cNvPr id="53" name="Shape 51"/>
+          <p:cNvSpPr/>
+          <p:nvPr/>
+        </p:nvSpPr>
+        <p:spPr>
+          <a:xfrm>
+            <a:off x="4343400" y="5532120"/>
+            <a:ext cx="1783080" cy="457200"/>
+          </a:xfrm>
+          <a:prstGeom prst="roundRect">
+            <a:avLst>
+              <a:gd name="adj" fmla="val 16000"/>
+            </a:avLst>
+          </a:prstGeom>
+          <a:solidFill>
+            <a:srgbClr val="CC9C8A"/>
+          </a:solidFill>
+          <a:ln w="12700">
+            <a:solidFill>
+              <a:srgbClr val="1B7A93"/>
+            </a:solidFill>
+            <a:prstDash val="solid"/>
+          </a:ln>
+          <a:effectLst>
+            <a:outerShdw blurRad="76200" dist="25400" dir="5400000" algn="bl" rotWithShape="0">
+              <a:srgbClr val="1B2733">
+                <a:alpha val="18000"/>
+              </a:srgbClr>
+            </a:outerShdw>
+          </a:effectLst>
+        </p:spPr>
+        <p:txBody>
+          <a:bodyPr/>
+          <a:lstStyle/>
+          <a:p>
+            <a:endParaRPr lang="en-US"/>
+          </a:p>
+        </p:txBody>
+      </p:sp>
+      <p:sp>
+        <p:nvSpPr>
+          <p:cNvPr id="54" name="Text 52"/>
+          <p:cNvSpPr/>
+          <p:nvPr/>
+        </p:nvSpPr>
+        <p:spPr>
+          <a:xfrm>
+            <a:off x="4416552" y="5532120"/>
+            <a:ext cx="1636776" cy="457200"/>
+          </a:xfrm>
+          <a:prstGeom prst="rect">
+            <a:avLst/>
+          </a:prstGeom>
+          <a:noFill/>
+          <a:ln/>
+        </p:spPr>
+        <p:txBody>
+          <a:bodyPr wrap="square" lIns="0" tIns="0" rIns="0" bIns="0" rtlCol="0" anchor="ctr"/>
+          <a:lstStyle/>
+          <a:p>
+            <a:pPr marL="0" indent="0" algn="ctr">
+              <a:buNone/>
+            </a:pPr>
+            <a:r>
+              <a:rPr lang="en-US" sz="1200" b="1" dirty="0">
+                <a:solidFill>
+                  <a:srgbClr val="12293A"/>
+                </a:solidFill>
+                <a:latin typeface="Calibri" pitchFamily="34" charset="0"/>
+                <a:ea typeface="Calibri" pitchFamily="34" charset="-122"/>
+                <a:cs typeface="Calibri" pitchFamily="34" charset="-120"/>
+              </a:rPr>
+              <a:t>Translation API</a:t>
+            </a:r>
+            <a:endParaRPr lang="en-US" sz="1200" dirty="0"/>
+          </a:p>
+        </p:txBody>
+      </p:sp>
+      <p:sp>
+        <p:nvSpPr>
+          <p:cNvPr id="55" name="Shape 53"/>
+          <p:cNvSpPr/>
+          <p:nvPr/>
+        </p:nvSpPr>
+        <p:spPr>
+          <a:xfrm>
+            <a:off x="4206240" y="6126480"/>
+            <a:ext cx="2057400" cy="457200"/>
+          </a:xfrm>
+          <a:prstGeom prst="roundRect">
+            <a:avLst>
+              <a:gd name="adj" fmla="val 16000"/>
+            </a:avLst>
+          </a:prstGeom>
+          <a:solidFill>
+            <a:srgbClr val="CC9C8A"/>
+          </a:solidFill>
+          <a:ln w="12700">
+            <a:solidFill>
+              <a:srgbClr val="1B7A93"/>
+            </a:solidFill>
+            <a:prstDash val="solid"/>
+          </a:ln>
+          <a:effectLst>
+            <a:outerShdw blurRad="76200" dist="25400" dir="5400000" algn="bl" rotWithShape="0">
+              <a:srgbClr val="1B2733">
+                <a:alpha val="18000"/>
+              </a:srgbClr>
+            </a:outerShdw>
+          </a:effectLst>
+        </p:spPr>
+        <p:txBody>
+          <a:bodyPr/>
+          <a:lstStyle/>
+          <a:p>
+            <a:endParaRPr lang="en-US"/>
+          </a:p>
+        </p:txBody>
+      </p:sp>
+      <p:sp>
+        <p:nvSpPr>
+          <p:cNvPr id="56" name="Text 54"/>
+          <p:cNvSpPr/>
+          <p:nvPr/>
+        </p:nvSpPr>
+        <p:spPr>
+          <a:xfrm>
+            <a:off x="4279392" y="6126480"/>
+            <a:ext cx="1911096" cy="457200"/>
+          </a:xfrm>
+          <a:prstGeom prst="rect">
+            <a:avLst/>
+          </a:prstGeom>
+          <a:noFill/>
+          <a:ln/>
+        </p:spPr>
+        <p:txBody>
+          <a:bodyPr wrap="square" lIns="0" tIns="0" rIns="0" bIns="0" rtlCol="0" anchor="ctr"/>
+          <a:lstStyle/>
+          <a:p>
+            <a:pPr marL="0" indent="0" algn="ctr">
+              <a:buNone/>
+            </a:pPr>
+            <a:r>
+              <a:rPr lang="en-US" sz="1150" b="1" dirty="0">
+                <a:solidFill>
+                  <a:srgbClr val="12293A"/>
+                </a:solidFill>
+                <a:latin typeface="Calibri" pitchFamily="34" charset="0"/>
+                <a:ea typeface="Calibri" pitchFamily="34" charset="-122"/>
+                <a:cs typeface="Calibri" pitchFamily="34" charset="-120"/>
+              </a:rPr>
+              <a:t>LLM Call –2</a:t>
+            </a:r>
+            <a:endParaRPr lang="en-US" sz="1150" dirty="0"/>
+          </a:p>
+          <a:p>
+            <a:pPr marL="0" indent="0" algn="ctr">
+              <a:buNone/>
+            </a:pPr>
+            <a:r>
+              <a:rPr lang="en-US" sz="1150" b="1" dirty="0">
+                <a:solidFill>
+                  <a:srgbClr val="12293A"/>
+                </a:solidFill>
+                <a:latin typeface="Calibri" pitchFamily="34" charset="0"/>
+                <a:ea typeface="Calibri" pitchFamily="34" charset="-122"/>
+                <a:cs typeface="Calibri" pitchFamily="34" charset="-120"/>
+              </a:rPr>
+              <a:t>(for Translation)</a:t>
+            </a:r>
+            <a:endParaRPr lang="en-US" sz="1150" dirty="0"/>
+          </a:p>
+        </p:txBody>
+      </p:sp>
+      <p:sp>
+        <p:nvSpPr>
+          <p:cNvPr id="57" name="Shape 55"/>
+          <p:cNvSpPr/>
+          <p:nvPr/>
+        </p:nvSpPr>
+        <p:spPr>
+          <a:xfrm>
+            <a:off x="9006840" y="4526280"/>
+            <a:ext cx="2286000" cy="1051560"/>
+          </a:xfrm>
+          <a:prstGeom prst="roundRect">
+            <a:avLst>
+              <a:gd name="adj" fmla="val 6957"/>
+            </a:avLst>
+          </a:prstGeom>
+          <a:solidFill>
+            <a:srgbClr val="FFFFFF"/>
+          </a:solidFill>
+          <a:ln w="12700">
+            <a:solidFill>
+              <a:srgbClr val="D7E4EA"/>
+            </a:solidFill>
+            <a:prstDash val="solid"/>
+          </a:ln>
+        </p:spPr>
+        <p:txBody>
+          <a:bodyPr/>
+          <a:lstStyle/>
+          <a:p>
+            <a:endParaRPr lang="en-US"/>
+          </a:p>
+        </p:txBody>
+      </p:sp>
+      <p:sp>
+        <p:nvSpPr>
+          <p:cNvPr id="58" name="Text 56"/>
+          <p:cNvSpPr/>
+          <p:nvPr/>
+        </p:nvSpPr>
+        <p:spPr>
+          <a:xfrm>
+            <a:off x="9144000" y="4599432"/>
+            <a:ext cx="2011680" cy="182880"/>
+          </a:xfrm>
+          <a:prstGeom prst="rect">
+            <a:avLst/>
+          </a:prstGeom>
+          <a:noFill/>
+          <a:ln/>
+        </p:spPr>
+        <p:txBody>
+          <a:bodyPr wrap="square" lIns="0" tIns="0" rIns="0" bIns="0" rtlCol="0" anchor="ctr"/>
+          <a:lstStyle/>
+          <a:p>
+            <a:pPr marL="0" indent="0">
+              <a:buNone/>
+            </a:pPr>
+            <a:r>
+              <a:rPr lang="en-US" sz="850" b="1" kern="0" spc="100" dirty="0">
+                <a:solidFill>
+                  <a:srgbClr val="0A2A3D"/>
+                </a:solidFill>
+                <a:latin typeface="Calibri" pitchFamily="34" charset="0"/>
+                <a:ea typeface="Calibri" pitchFamily="34" charset="-122"/>
+                <a:cs typeface="Calibri" pitchFamily="34" charset="-120"/>
+              </a:rPr>
+              <a:t>KEY</a:t>
+            </a:r>
+            <a:endParaRPr lang="en-US" sz="850" dirty="0"/>
+          </a:p>
+        </p:txBody>
+      </p:sp>
+      <p:sp>
+        <p:nvSpPr>
+          <p:cNvPr id="59" name="Shape 57"/>
+          <p:cNvSpPr/>
+          <p:nvPr/>
+        </p:nvSpPr>
+        <p:spPr>
+          <a:xfrm>
+            <a:off x="9171432" y="4855464"/>
+            <a:ext cx="292608" cy="0"/>
+          </a:xfrm>
+          <a:prstGeom prst="line">
+            <a:avLst/>
+          </a:prstGeom>
+          <a:noFill/>
+          <a:ln w="15875">
+            <a:solidFill>
+              <a:srgbClr val="5C7A8A"/>
+            </a:solidFill>
+            <a:prstDash val="dash"/>
+          </a:ln>
+        </p:spPr>
+        <p:txBody>
+          <a:bodyPr/>
+          <a:lstStyle/>
+          <a:p>
+            <a:endParaRPr lang="en-US"/>
+          </a:p>
+        </p:txBody>
+      </p:sp>
+      <p:sp>
+        <p:nvSpPr>
+          <p:cNvPr id="60" name="Text 58"/>
+          <p:cNvSpPr/>
+          <p:nvPr/>
+        </p:nvSpPr>
+        <p:spPr>
+          <a:xfrm>
+            <a:off x="9537192" y="4782312"/>
+            <a:ext cx="1645920" cy="164592"/>
+          </a:xfrm>
+          <a:prstGeom prst="rect">
+            <a:avLst/>
+          </a:prstGeom>
+          <a:noFill/>
+          <a:ln/>
+        </p:spPr>
+        <p:txBody>
+          <a:bodyPr wrap="square" lIns="0" tIns="0" rIns="0" bIns="0" rtlCol="0" anchor="ctr"/>
+          <a:lstStyle/>
+          <a:p>
+            <a:pPr marL="0" indent="0">
+              <a:buNone/>
+            </a:pPr>
+            <a:r>
+              <a:rPr lang="en-US" sz="800" dirty="0">
+                <a:solidFill>
+                  <a:srgbClr val="12293A"/>
+                </a:solidFill>
+                <a:latin typeface="Calibri" pitchFamily="34" charset="0"/>
+                <a:ea typeface="Calibri" pitchFamily="34" charset="-122"/>
+                <a:cs typeface="Calibri" pitchFamily="34" charset="-120"/>
+              </a:rPr>
+              <a:t>Layer boundary</a:t>
+            </a:r>
+            <a:endParaRPr lang="en-US" sz="800" dirty="0"/>
+          </a:p>
+        </p:txBody>
+      </p:sp>
+      <p:sp>
+        <p:nvSpPr>
+          <p:cNvPr id="61" name="Shape 59"/>
+          <p:cNvSpPr/>
+          <p:nvPr/>
+        </p:nvSpPr>
+        <p:spPr>
+          <a:xfrm>
+            <a:off x="9171432" y="5056632"/>
+            <a:ext cx="292608" cy="0"/>
+          </a:xfrm>
+          <a:prstGeom prst="line">
+            <a:avLst/>
+          </a:prstGeom>
+          <a:noFill/>
+          <a:ln w="19050">
+            <a:solidFill>
+              <a:srgbClr val="12293A"/>
+            </a:solidFill>
+            <a:prstDash val="solid"/>
+            <a:tailEnd type="triangle"/>
+          </a:ln>
+        </p:spPr>
+        <p:txBody>
+          <a:bodyPr/>
+          <a:lstStyle/>
+          <a:p>
+            <a:endParaRPr lang="en-US"/>
+          </a:p>
+        </p:txBody>
+      </p:sp>
+      <p:sp>
+        <p:nvSpPr>
+          <p:cNvPr id="62" name="Text 60"/>
+          <p:cNvSpPr/>
+          <p:nvPr/>
+        </p:nvSpPr>
+        <p:spPr>
+          <a:xfrm>
+            <a:off x="9537192" y="4983480"/>
+            <a:ext cx="1645920" cy="164592"/>
+          </a:xfrm>
+          <a:prstGeom prst="rect">
+            <a:avLst/>
+          </a:prstGeom>
+          <a:noFill/>
+          <a:ln/>
+        </p:spPr>
+        <p:txBody>
+          <a:bodyPr wrap="square" lIns="0" tIns="0" rIns="0" bIns="0" rtlCol="0" anchor="ctr"/>
+          <a:lstStyle/>
+          <a:p>
+            <a:pPr marL="0" indent="0">
+              <a:buNone/>
+            </a:pPr>
+            <a:r>
+              <a:rPr lang="en-US" sz="800" dirty="0">
+                <a:solidFill>
+                  <a:srgbClr val="12293A"/>
+                </a:solidFill>
+                <a:latin typeface="Calibri" pitchFamily="34" charset="0"/>
+                <a:ea typeface="Calibri" pitchFamily="34" charset="-122"/>
+                <a:cs typeface="Calibri" pitchFamily="34" charset="-120"/>
+              </a:rPr>
+              <a:t>Synchronous call</a:t>
+            </a:r>
+            <a:endParaRPr lang="en-US" sz="800" dirty="0"/>
+          </a:p>
+        </p:txBody>
+      </p:sp>
+      <p:sp>
+        <p:nvSpPr>
+          <p:cNvPr id="63" name="Text 61"/>
+          <p:cNvSpPr/>
+          <p:nvPr/>
+        </p:nvSpPr>
+        <p:spPr>
+          <a:xfrm>
+            <a:off x="9171432" y="5202936"/>
+            <a:ext cx="1984248" cy="146304"/>
+          </a:xfrm>
+          <a:prstGeom prst="rect">
+            <a:avLst/>
+          </a:prstGeom>
+          <a:noFill/>
+          <a:ln/>
+        </p:spPr>
+        <p:txBody>
+          <a:bodyPr wrap="square" lIns="0" tIns="0" rIns="0" bIns="0" rtlCol="0" anchor="ctr"/>
+          <a:lstStyle/>
+          <a:p>
+            <a:pPr marL="0" indent="0">
+              <a:buNone/>
+            </a:pPr>
+            <a:r>
+              <a:rPr lang="en-US" sz="750" dirty="0">
+                <a:solidFill>
+                  <a:srgbClr val="5C7A8A"/>
+                </a:solidFill>
+                <a:latin typeface="Consolas" pitchFamily="34" charset="0"/>
+                <a:ea typeface="Consolas" pitchFamily="34" charset="-122"/>
+                <a:cs typeface="Consolas" pitchFamily="34" charset="-120"/>
+              </a:rPr>
+              <a:t>REST · model invoke</a:t>
+            </a:r>
+            <a:endParaRPr lang="en-US" sz="750" dirty="0"/>
+          </a:p>
+        </p:txBody>
+      </p:sp>
+      <p:sp>
+        <p:nvSpPr>
+          <p:cNvPr id="64" name="Text 62"/>
+          <p:cNvSpPr/>
+          <p:nvPr/>
+        </p:nvSpPr>
+        <p:spPr>
+          <a:xfrm>
+            <a:off x="9171432" y="5367528"/>
+            <a:ext cx="1984248" cy="164592"/>
+          </a:xfrm>
+          <a:prstGeom prst="rect">
+            <a:avLst/>
+          </a:prstGeom>
+          <a:noFill/>
+          <a:ln/>
+        </p:spPr>
+        <p:txBody>
+          <a:bodyPr wrap="square" lIns="0" tIns="0" rIns="0" bIns="0" rtlCol="0" anchor="ctr"/>
+          <a:lstStyle/>
+          <a:p>
+            <a:pPr marL="0" indent="0">
+              <a:buNone/>
+            </a:pPr>
+            <a:r>
+              <a:rPr lang="en-US" sz="800" i="1" dirty="0">
+                <a:solidFill>
+                  <a:srgbClr val="12293A"/>
+                </a:solidFill>
+                <a:latin typeface="Calibri" pitchFamily="34" charset="0"/>
+                <a:ea typeface="Calibri" pitchFamily="34" charset="-122"/>
+                <a:cs typeface="Calibri" pitchFamily="34" charset="-120"/>
+              </a:rPr>
+              <a:t>Call type / protocol tag</a:t>
+            </a:r>
+            <a:endParaRPr lang="en-US" sz="800" dirty="0"/>
+          </a:p>
+        </p:txBody>
+      </p:sp>
+      <p:sp>
+        <p:nvSpPr>
+          <p:cNvPr id="65" name="Text 63"/>
+          <p:cNvSpPr/>
+          <p:nvPr/>
+        </p:nvSpPr>
+        <p:spPr>
+          <a:xfrm>
+            <a:off x="11658600" y="6473952"/>
+            <a:ext cx="457200" cy="274320"/>
+          </a:xfrm>
+          <a:prstGeom prst="rect">
+            <a:avLst/>
+          </a:prstGeom>
+          <a:noFill/>
+          <a:ln/>
+        </p:spPr>
+        <p:txBody>
+          <a:bodyPr wrap="square" lIns="0" tIns="0" rIns="0" bIns="0" rtlCol="0" anchor="ctr"/>
+          <a:lstStyle/>
+          <a:p>
+            <a:pPr marL="0" indent="0" algn="r">
+              <a:buNone/>
+            </a:pPr>
+            <a:r>
+              <a:rPr lang="en-US" sz="1000" dirty="0">
+                <a:solidFill>
+                  <a:srgbClr val="5C7A8A"/>
+                </a:solidFill>
+                <a:latin typeface="Calibri" pitchFamily="34" charset="0"/>
+                <a:ea typeface="Calibri" pitchFamily="34" charset="-122"/>
+                <a:cs typeface="Calibri" pitchFamily="34" charset="-120"/>
+              </a:rPr>
+              <a:t>17</a:t>
+            </a:r>
+            <a:endParaRPr lang="en-US" sz="1000" dirty="0"/>
+          </a:p>
+        </p:txBody>
+      </p:sp>
+    </p:spTree>
+  </p:cSld>
+  <p:clrMapOvr>
+    <a:masterClrMapping/>
+  </p:clrMapOvr>
+</p:sld>
+</file>
+
+<file path=ppt/slides/slide15.xml><?xml version="1.0" encoding="utf-8"?>
+<p:sld xmlns:a="http://schemas.openxmlformats.org/drawingml/2006/main" xmlns:r="http://schemas.openxmlformats.org/officeDocument/2006/relationships" xmlns:p="http://schemas.openxmlformats.org/presentationml/2006/main">
   <p:cSld name="Slide 14">
     <p:bg>
       <p:bgPr>
@@ -7573,7 +10124,7 @@
 </p:sld>
 </file>
 
-<file path=ppt/slides/slide15.xml><?xml version="1.0" encoding="utf-8"?>
+<file path=ppt/slides/slide16.xml><?xml version="1.0" encoding="utf-8"?>
 <p:sld xmlns:a="http://schemas.openxmlformats.org/drawingml/2006/main" xmlns:r="http://schemas.openxmlformats.org/officeDocument/2006/relationships" xmlns:p="http://schemas.openxmlformats.org/presentationml/2006/main">
   <p:cSld name="Slide 15">
     <p:bg>
